--- a/docs/apG31.pptx
+++ b/docs/apG31.pptx
@@ -13,6 +13,7 @@
     <p:sldId id="261" r:id="rId7"/>
     <p:sldId id="262" r:id="rId8"/>
     <p:sldId id="263" r:id="rId9"/>
+    <p:sldId id="270" r:id="rId21"/>
     <p:sldId id="264" r:id="rId10"/>
     <p:sldId id="265" r:id="rId11"/>
     <p:sldId id="266" r:id="rId12"/>
@@ -3158,7 +3159,7 @@
                 <a:ea typeface="Calibri" pitchFamily="34" charset="-122"/>
                 <a:cs typeface="Calibri" pitchFamily="34" charset="-120"/>
               </a:rPr>
-              <a:t>id, eventId, code (UUID), price, status</a:t>
+              <a:t>id, eventId, code (UUID), price, status, ownerSub, validatorSub, paymentMethod</a:t>
             </a:r>
             <a:endParaRPr lang="en-US" sz="1200" dirty="0"/>
           </a:p>
@@ -3497,7 +3498,7 @@
                 <a:ea typeface="Calibri" pitchFamily="34" charset="-122"/>
                 <a:cs typeface="Calibri" pitchFamily="34" charset="-120"/>
               </a:rPr>
-              <a:t>MatchStats</a:t>
+              <a:t>MatchSummary</a:t>
             </a:r>
             <a:pPr indent="0" marL="0">
               <a:buNone/>
@@ -3517,7 +3518,7 @@
                 <a:ea typeface="Calibri" pitchFamily="34" charset="-122"/>
                 <a:cs typeface="Calibri" pitchFamily="34" charset="-120"/>
               </a:rPr>
-              <a:t>matchId, scorers, cards, ...</a:t>
+              <a:t>matchId, season, status, kickoff, scores, refereeName</a:t>
             </a:r>
             <a:endParaRPr lang="en-US" sz="1200" dirty="0"/>
           </a:p>
@@ -3556,7 +3557,7 @@
                 <a:ea typeface="Calibri" pitchFamily="34" charset="-122"/>
                 <a:cs typeface="Calibri" pitchFamily="34" charset="-120"/>
               </a:rPr>
-              <a:t>PlayerStats</a:t>
+              <a:t>LineupSnapshot</a:t>
             </a:r>
             <a:pPr indent="0" marL="0">
               <a:buNone/>
@@ -3576,7 +3577,7 @@
                 <a:ea typeface="Calibri" pitchFamily="34" charset="-122"/>
                 <a:cs typeface="Calibri" pitchFamily="34" charset="-120"/>
               </a:rPr>
-              <a:t>playerId, season, goals, cards</a:t>
+              <a:t>matchId, playerId, teamId, role</a:t>
             </a:r>
             <a:endParaRPr lang="en-US" sz="1200" dirty="0"/>
           </a:p>
@@ -3615,7 +3616,7 @@
                 <a:ea typeface="Calibri" pitchFamily="34" charset="-122"/>
                 <a:cs typeface="Calibri" pitchFamily="34" charset="-120"/>
               </a:rPr>
-              <a:t>TeamStats</a:t>
+              <a:t>OccurrenceSnapshot</a:t>
             </a:r>
             <a:pPr indent="0" marL="0">
               <a:buNone/>
@@ -3635,7 +3636,7 @@
                 <a:ea typeface="Calibri" pitchFamily="34" charset="-122"/>
                 <a:cs typeface="Calibri" pitchFamily="34" charset="-120"/>
               </a:rPr>
-              <a:t>teamId, season, won, drawn, lost</a:t>
+              <a:t>id, matchId, minute, type (GOAL/CARD/SUB)</a:t>
             </a:r>
             <a:endParaRPr lang="en-US" sz="1200" dirty="0"/>
           </a:p>
@@ -3674,7 +3675,7 @@
                 <a:ea typeface="Calibri" pitchFamily="34" charset="-122"/>
                 <a:cs typeface="Calibri" pitchFamily="34" charset="-120"/>
               </a:rPr>
-              <a:t>EventSales</a:t>
+              <a:t>TicketSale</a:t>
             </a:r>
             <a:pPr indent="0" marL="0">
               <a:buNone/>
@@ -3694,7 +3695,7 @@
                 <a:ea typeface="Calibri" pitchFamily="34" charset="-122"/>
                 <a:cs typeface="Calibri" pitchFamily="34" charset="-120"/>
               </a:rPr>
-              <a:t>eventId, sold, validated, revenue</a:t>
+              <a:t>ticketId, eventId, matchId, price, paidAt, validatedAt</a:t>
             </a:r>
             <a:endParaRPr lang="en-US" sz="1200" dirty="0"/>
           </a:p>
@@ -3812,7 +3813,7 @@
                 <a:ea typeface="Calibri" pitchFamily="34" charset="-122"/>
                 <a:cs typeface="Calibri" pitchFamily="34" charset="-120"/>
               </a:rPr>
-              <a:t>(planeado)</a:t>
+              <a:t>(implementado)</a:t>
             </a:r>
             <a:endParaRPr lang="en-US" sz="1200" dirty="0"/>
           </a:p>
@@ -3890,7 +3891,7 @@
                 <a:ea typeface="Calibri" pitchFamily="34" charset="-122"/>
                 <a:cs typeface="Calibri" pitchFamily="34" charset="-120"/>
               </a:rPr>
-              <a:t>10</a:t>
+              <a:t>11</a:t>
             </a:r>
             <a:endParaRPr lang="en-US" sz="900" dirty="0"/>
           </a:p>
@@ -4184,7 +4185,7 @@
                 <a:ea typeface="Consolas" pitchFamily="34" charset="-122"/>
                 <a:cs typeface="Consolas" pitchFamily="34" charset="-120"/>
               </a:rPr>
-              <a:t>[OK] Building all services... </a:t>
+              <a:t xml:space="preserve">[OK] Building all services... </a:t>
             </a:r>
             <a:pPr indent="0" marL="0">
               <a:buNone/>
@@ -4213,7 +4214,7 @@
                 <a:ea typeface="Consolas" pitchFamily="34" charset="-122"/>
                 <a:cs typeface="Consolas" pitchFamily="34" charset="-120"/>
               </a:rPr>
-              <a:t>  bff-service          : SUCCESS
+              <a:t xml:space="preserve">  bff-service          : SUCCESS
 </a:t>
             </a:r>
             <a:pPr indent="0" marL="0">
@@ -4228,7 +4229,7 @@
                 <a:ea typeface="Consolas" pitchFamily="34" charset="-122"/>
                 <a:cs typeface="Consolas" pitchFamily="34" charset="-120"/>
               </a:rPr>
-              <a:t>  ticket-service       : SUCCESS
+              <a:t xml:space="preserve">  ticket-service       : SUCCESS
 </a:t>
             </a:r>
             <a:pPr indent="0" marL="0">
@@ -4243,7 +4244,7 @@
                 <a:ea typeface="Consolas" pitchFamily="34" charset="-122"/>
                 <a:cs typeface="Consolas" pitchFamily="34" charset="-120"/>
               </a:rPr>
-              <a:t>  match-service        : SUCCESS
+              <a:t xml:space="preserve">  match-service        : SUCCESS
 </a:t>
             </a:r>
             <a:pPr indent="0" marL="0">
@@ -4258,7 +4259,7 @@
                 <a:ea typeface="Consolas" pitchFamily="34" charset="-122"/>
                 <a:cs typeface="Consolas" pitchFamily="34" charset="-120"/>
               </a:rPr>
-              <a:t>  statistics-service   : SUCCESS
+              <a:t xml:space="preserve">  statistics-service   : SUCCESS
 </a:t>
             </a:r>
             <a:pPr indent="0" marL="0">
@@ -4288,7 +4289,7 @@
                 <a:ea typeface="Consolas" pitchFamily="34" charset="-122"/>
                 <a:cs typeface="Consolas" pitchFamily="34" charset="-120"/>
               </a:rPr>
-              <a:t>  9 containers running on tessera-net
+              <a:t xml:space="preserve">  9 containers running on tessera-net
 </a:t>
             </a:r>
             <a:pPr indent="0" marL="0">
@@ -4318,7 +4319,7 @@
                 <a:ea typeface="Consolas" pitchFamily="34" charset="-122"/>
                 <a:cs typeface="Consolas" pitchFamily="34" charset="-120"/>
               </a:rPr>
-              <a:t>  App:       http://localhost:8000
+              <a:t xml:space="preserve">  App:       http://localhost:8000
 </a:t>
             </a:r>
             <a:pPr indent="0" marL="0">
@@ -4333,7 +4334,7 @@
                 <a:ea typeface="Consolas" pitchFamily="34" charset="-122"/>
                 <a:cs typeface="Consolas" pitchFamily="34" charset="-120"/>
               </a:rPr>
-              <a:t>  BFF API:   http://localhost:8000/api
+              <a:t xml:space="preserve">  BFF API:   http://localhost:8000/api
 </a:t>
             </a:r>
             <a:pPr indent="0" marL="0">
@@ -4348,7 +4349,7 @@
                 <a:ea typeface="Consolas" pitchFamily="34" charset="-122"/>
                 <a:cs typeface="Consolas" pitchFamily="34" charset="-120"/>
               </a:rPr>
-              <a:t>  Keycloak:  http://localhost:8180</a:t>
+              <a:t xml:space="preserve">  Keycloak:  http://localhost:8180</a:t>
             </a:r>
             <a:endParaRPr lang="en-US" sz="1000" dirty="0"/>
           </a:p>
@@ -4580,7 +4581,7 @@
                 <a:ea typeface="Calibri" pitchFamily="34" charset="-122"/>
                 <a:cs typeface="Calibri" pitchFamily="34" charset="-120"/>
               </a:rPr>
-              <a:t>11</a:t>
+              <a:t>12</a:t>
             </a:r>
             <a:endParaRPr lang="en-US" sz="900" dirty="0"/>
           </a:p>
@@ -4797,7 +4798,7 @@
                 <a:ea typeface="Calibri" pitchFamily="34" charset="-122"/>
                 <a:cs typeface="Calibri" pitchFamily="34" charset="-120"/>
               </a:rPr>
-              <a:t>Problema: </a:t>
+              <a:t xml:space="preserve">Problema: </a:t>
             </a:r>
             <a:pPr indent="0" marL="0">
               <a:lnSpc>
@@ -4832,7 +4833,7 @@
                 <a:ea typeface="Calibri" pitchFamily="34" charset="-122"/>
                 <a:cs typeface="Calibri" pitchFamily="34" charset="-120"/>
               </a:rPr>
-              <a:t>Causa: </a:t>
+              <a:t xml:space="preserve">Causa: </a:t>
             </a:r>
             <a:pPr indent="0" marL="0">
               <a:lnSpc>
@@ -4867,7 +4868,7 @@
                 <a:ea typeface="Calibri" pitchFamily="34" charset="-122"/>
                 <a:cs typeface="Calibri" pitchFamily="34" charset="-120"/>
               </a:rPr>
-              <a:t>Solução: </a:t>
+              <a:t xml:space="preserve">Solução: </a:t>
             </a:r>
             <a:pPr indent="0" marL="0">
               <a:lnSpc>
@@ -4971,7 +4972,7 @@
                 <a:ea typeface="Calibri" pitchFamily="34" charset="-122"/>
                 <a:cs typeface="Calibri" pitchFamily="34" charset="-120"/>
               </a:rPr>
-              <a:t>Problema: </a:t>
+              <a:t xml:space="preserve">Problema: </a:t>
             </a:r>
             <a:pPr indent="0" marL="0">
               <a:lnSpc>
@@ -5006,7 +5007,7 @@
                 <a:ea typeface="Calibri" pitchFamily="34" charset="-122"/>
                 <a:cs typeface="Calibri" pitchFamily="34" charset="-120"/>
               </a:rPr>
-              <a:t>Causa: </a:t>
+              <a:t xml:space="preserve">Causa: </a:t>
             </a:r>
             <a:pPr indent="0" marL="0">
               <a:lnSpc>
@@ -5041,7 +5042,7 @@
                 <a:ea typeface="Calibri" pitchFamily="34" charset="-122"/>
                 <a:cs typeface="Calibri" pitchFamily="34" charset="-120"/>
               </a:rPr>
-              <a:t>Solução: </a:t>
+              <a:t xml:space="preserve">Solução: </a:t>
             </a:r>
             <a:pPr indent="0" marL="0">
               <a:lnSpc>
@@ -5145,7 +5146,7 @@
                 <a:ea typeface="Calibri" pitchFamily="34" charset="-122"/>
                 <a:cs typeface="Calibri" pitchFamily="34" charset="-120"/>
               </a:rPr>
-              <a:t>Problema: </a:t>
+              <a:t xml:space="preserve">Problema: </a:t>
             </a:r>
             <a:pPr indent="0" marL="0">
               <a:lnSpc>
@@ -5162,7 +5163,7 @@
                 <a:ea typeface="Calibri" pitchFamily="34" charset="-122"/>
                 <a:cs typeface="Calibri" pitchFamily="34" charset="-120"/>
               </a:rPr>
-              <a:t>Porta 80 ocupada no host (outro NGINX em WSL)
+              <a:t>JWT do Keycloak sem claim "sub"
 </a:t>
             </a:r>
             <a:pPr indent="0" marL="0">
@@ -5180,7 +5181,7 @@
                 <a:ea typeface="Calibri" pitchFamily="34" charset="-122"/>
                 <a:cs typeface="Calibri" pitchFamily="34" charset="-120"/>
               </a:rPr>
-              <a:t>Causa: </a:t>
+              <a:t xml:space="preserve">Causa: </a:t>
             </a:r>
             <a:pPr indent="0" marL="0">
               <a:lnSpc>
@@ -5197,7 +5198,7 @@
                 <a:ea typeface="Calibri" pitchFamily="34" charset="-122"/>
                 <a:cs typeface="Calibri" pitchFamily="34" charset="-120"/>
               </a:rPr>
-              <a:t>Máquina de desenvolvimento já tinha um NGINX a correr na porta 80
+              <a:t>O realm-export não tinha mapper para "sub"; jwt.subject vinha null e rebentava NPE no ticket-service
 </a:t>
             </a:r>
             <a:pPr indent="0" marL="0">
@@ -5215,7 +5216,7 @@
                 <a:ea typeface="Calibri" pitchFamily="34" charset="-122"/>
                 <a:cs typeface="Calibri" pitchFamily="34" charset="-120"/>
               </a:rPr>
-              <a:t>Solução: </a:t>
+              <a:t xml:space="preserve">Solução: </a:t>
             </a:r>
             <a:pPr indent="0" marL="0">
               <a:lnSpc>
@@ -5232,7 +5233,7 @@
                 <a:ea typeface="Calibri" pitchFamily="34" charset="-122"/>
                 <a:cs typeface="Calibri" pitchFamily="34" charset="-120"/>
               </a:rPr>
-              <a:t>Configurámos o nosso NGINX para a porta 8000</a:t>
+              <a:t>Adicionámos protocol mapper "sub" no realm + fallback chain (sub → preferred_username) no helper userIdOf()</a:t>
             </a:r>
             <a:endParaRPr lang="en-US" sz="1100" dirty="0"/>
           </a:p>
@@ -5319,7 +5320,7 @@
                 <a:ea typeface="Calibri" pitchFamily="34" charset="-122"/>
                 <a:cs typeface="Calibri" pitchFamily="34" charset="-120"/>
               </a:rPr>
-              <a:t>Problema: </a:t>
+              <a:t xml:space="preserve">Problema: </a:t>
             </a:r>
             <a:pPr indent="0" marL="0">
               <a:lnSpc>
@@ -5354,7 +5355,7 @@
                 <a:ea typeface="Calibri" pitchFamily="34" charset="-122"/>
                 <a:cs typeface="Calibri" pitchFamily="34" charset="-120"/>
               </a:rPr>
-              <a:t>Causa: </a:t>
+              <a:t xml:space="preserve">Causa: </a:t>
             </a:r>
             <a:pPr indent="0" marL="0">
               <a:lnSpc>
@@ -5389,7 +5390,7 @@
                 <a:ea typeface="Calibri" pitchFamily="34" charset="-122"/>
                 <a:cs typeface="Calibri" pitchFamily="34" charset="-120"/>
               </a:rPr>
-              <a:t>Solução: </a:t>
+              <a:t xml:space="preserve">Solução: </a:t>
             </a:r>
             <a:pPr indent="0" marL="0">
               <a:lnSpc>
@@ -5493,7 +5494,7 @@
                 <a:ea typeface="Calibri" pitchFamily="34" charset="-122"/>
                 <a:cs typeface="Calibri" pitchFamily="34" charset="-120"/>
               </a:rPr>
-              <a:t>Problema: </a:t>
+              <a:t xml:space="preserve">Problema: </a:t>
             </a:r>
             <a:pPr indent="0" marL="0">
               <a:lnSpc>
@@ -5528,7 +5529,7 @@
                 <a:ea typeface="Calibri" pitchFamily="34" charset="-122"/>
                 <a:cs typeface="Calibri" pitchFamily="34" charset="-120"/>
               </a:rPr>
-              <a:t>Causa: </a:t>
+              <a:t xml:space="preserve">Causa: </a:t>
             </a:r>
             <a:pPr indent="0" marL="0">
               <a:lnSpc>
@@ -5563,7 +5564,7 @@
                 <a:ea typeface="Calibri" pitchFamily="34" charset="-122"/>
                 <a:cs typeface="Calibri" pitchFamily="34" charset="-120"/>
               </a:rPr>
-              <a:t>Solução: </a:t>
+              <a:t xml:space="preserve">Solução: </a:t>
             </a:r>
             <a:pPr indent="0" marL="0">
               <a:lnSpc>
@@ -5658,7 +5659,7 @@
                 <a:ea typeface="Calibri" pitchFamily="34" charset="-122"/>
                 <a:cs typeface="Calibri" pitchFamily="34" charset="-120"/>
               </a:rPr>
-              <a:t>12</a:t>
+              <a:t>13</a:t>
             </a:r>
             <a:endParaRPr lang="en-US" sz="900" dirty="0"/>
           </a:p>
@@ -5914,7 +5915,7 @@
                 <a:ea typeface="Calibri" pitchFamily="34" charset="-122"/>
                 <a:cs typeface="Calibri" pitchFamily="34" charset="-120"/>
               </a:rPr>
-              <a:t>* Implementar match-service (CRUD de clubes, equipas, jogadores, jogos)
+              <a:t>* Integração real com gateway SIBS (webhook callback)
 </a:t>
             </a:r>
             <a:pPr indent="0" marL="0">
@@ -5932,7 +5933,7 @@
                 <a:ea typeface="Calibri" pitchFamily="34" charset="-122"/>
                 <a:cs typeface="Calibri" pitchFamily="34" charset="-120"/>
               </a:rPr>
-              <a:t>* Implementar ficha técnica e ocorrências
+              <a:t>* Dead-letter queue + retry nos consumers RabbitMQ
 </a:t>
             </a:r>
             <a:pPr indent="0" marL="0">
@@ -5950,7 +5951,7 @@
                 <a:ea typeface="Calibri" pitchFamily="34" charset="-122"/>
                 <a:cs typeface="Calibri" pitchFamily="34" charset="-120"/>
               </a:rPr>
-              <a:t>* Implementar statistics-service
+              <a:t>* Tracing distribuído (traceId nos eventos)
 </a:t>
             </a:r>
             <a:pPr indent="0" marL="0">
@@ -5968,7 +5969,7 @@
                 <a:ea typeface="Calibri" pitchFamily="34" charset="-122"/>
                 <a:cs typeface="Calibri" pitchFamily="34" charset="-120"/>
               </a:rPr>
-              <a:t>* Integração SIBS / MB WAY no ticket-service
+              <a:t>* Reports avançados (top scorers, attendance)
 </a:t>
             </a:r>
             <a:pPr indent="0" marL="0">
@@ -5986,7 +5987,7 @@
                 <a:ea typeface="Calibri" pitchFamily="34" charset="-122"/>
                 <a:cs typeface="Calibri" pitchFamily="34" charset="-120"/>
               </a:rPr>
-              <a:t>* Eventos assíncronos com RabbitMQ
+              <a:t>* Refund flow (VALIDATED → REFUNDED por admin)
 </a:t>
             </a:r>
             <a:pPr indent="0" marL="0">
@@ -6004,7 +6005,7 @@
                 <a:ea typeface="Calibri" pitchFamily="34" charset="-122"/>
                 <a:cs typeface="Calibri" pitchFamily="34" charset="-120"/>
               </a:rPr>
-              <a:t>* Validação de tokens JWT no BFF
+              <a:t>* Limite de capacidade por evento (row-lock)
 </a:t>
             </a:r>
             <a:pPr indent="0" marL="0">
@@ -6149,7 +6150,7 @@
                 <a:ea typeface="Calibri" pitchFamily="34" charset="-122"/>
                 <a:cs typeface="Calibri" pitchFamily="34" charset="-120"/>
               </a:rPr>
-              <a:t>* SPA React: ecrãs de gestão para admin
+              <a:t>* Painéis admin: clubes, equipas, jogadores (CRUD)
 </a:t>
             </a:r>
             <a:pPr indent="0" marL="0">
@@ -6167,7 +6168,7 @@
                 <a:ea typeface="Calibri" pitchFamily="34" charset="-122"/>
                 <a:cs typeface="Calibri" pitchFamily="34" charset="-120"/>
               </a:rPr>
-              <a:t>* SPA React: compra de bilhetes para adeptos
+              <a:t>* Substituir mocks por queries reais ao API
 </a:t>
             </a:r>
             <a:pPr indent="0" marL="0">
@@ -6185,7 +6186,7 @@
                 <a:ea typeface="Calibri" pitchFamily="34" charset="-122"/>
                 <a:cs typeface="Calibri" pitchFamily="34" charset="-120"/>
               </a:rPr>
-              <a:t>* Geração de cliente TypeScript a partir do OpenAPI
+              <a:t>* Camera scanning real no /validate (jsQR / zxing)
 </a:t>
             </a:r>
             <a:pPr indent="0" marL="0">
@@ -6257,7 +6258,7 @@
                 <a:ea typeface="Calibri" pitchFamily="34" charset="-122"/>
                 <a:cs typeface="Calibri" pitchFamily="34" charset="-120"/>
               </a:rPr>
-              <a:t>* OCR de fichas técnicas em papel (opcional)
+              <a:t>* Geração de cliente TypeScript a partir do OpenAPI
 </a:t>
             </a:r>
             <a:endParaRPr lang="en-US" sz="1100" dirty="0"/>
@@ -6492,7 +6493,7 @@
                 <a:ea typeface="Calibri" pitchFamily="34" charset="-122"/>
                 <a:cs typeface="Calibri" pitchFamily="34" charset="-120"/>
               </a:rPr>
-              <a:t>* Validacao com SU 1.º Dezembro
+              <a:t>* Validação com SU 1.º Dezembro
 </a:t>
             </a:r>
             <a:endParaRPr lang="en-US" sz="1100" dirty="0"/>
@@ -6571,7 +6572,7 @@
                 <a:ea typeface="Calibri" pitchFamily="34" charset="-122"/>
                 <a:cs typeface="Calibri" pitchFamily="34" charset="-120"/>
               </a:rPr>
-              <a:t>13</a:t>
+              <a:t>14</a:t>
             </a:r>
             <a:endParaRPr lang="en-US" sz="900" dirty="0"/>
           </a:p>
@@ -6783,7 +6784,7 @@
                 <a:ea typeface="Calibri" pitchFamily="34" charset="-122"/>
                 <a:cs typeface="Calibri" pitchFamily="34" charset="-120"/>
               </a:rPr>
-              <a:t>Implementação backend (match-service)</a:t>
+              <a:t>Backend match-service  ✓</a:t>
             </a:r>
             <a:pPr indent="0" marL="0">
               <a:buNone/>
@@ -6797,7 +6798,7 @@
                 <a:ea typeface="Calibri" pitchFamily="34" charset="-122"/>
                 <a:cs typeface="Calibri" pitchFamily="34" charset="-120"/>
               </a:rPr>
-              <a:t>  -  Clubes, equipas, jogadores, jogos. Migrações Flyway, DTOs, controllers.</a:t>
+              <a:t xml:space="preserve">  -  Clubes, equipas, jogadores, jogos, ficha técnica, ocorrências, auto-lock.</a:t>
             </a:r>
             <a:endParaRPr lang="en-US" sz="1300" dirty="0"/>
           </a:p>
@@ -6895,7 +6896,7 @@
                 <a:ea typeface="Calibri" pitchFamily="34" charset="-122"/>
                 <a:cs typeface="Calibri" pitchFamily="34" charset="-120"/>
               </a:rPr>
-              <a:t>Bilheteira completa + integração SIBS</a:t>
+              <a:t>Bilhetes digitais (ticket-service)  ✓</a:t>
             </a:r>
             <a:pPr indent="0" marL="0">
               <a:buNone/>
@@ -6909,7 +6910,7 @@
                 <a:ea typeface="Calibri" pitchFamily="34" charset="-122"/>
                 <a:cs typeface="Calibri" pitchFamily="34" charset="-120"/>
               </a:rPr>
-              <a:t>  -  Pagamentos MB WAY, validação JWT, códigos QR.</a:t>
+              <a:t xml:space="preserve">  -  Ownership por JWT, QR, pay flow, validação. Gateway SIBS real fica para depois.</a:t>
             </a:r>
             <a:endParaRPr lang="en-US" sz="1300" dirty="0"/>
           </a:p>
@@ -7007,7 +7008,7 @@
                 <a:ea typeface="Calibri" pitchFamily="34" charset="-122"/>
                 <a:cs typeface="Calibri" pitchFamily="34" charset="-120"/>
               </a:rPr>
-              <a:t>Ficha técnica em tempo real</a:t>
+              <a:t>Statistics + RabbitMQ events  ✓</a:t>
             </a:r>
             <a:pPr indent="0" marL="0">
               <a:buNone/>
@@ -7021,7 +7022,7 @@
                 <a:ea typeface="Calibri" pitchFamily="34" charset="-122"/>
                 <a:cs typeface="Calibri" pitchFamily="34" charset="-120"/>
               </a:rPr>
-              <a:t>  -  Endpoints de match sheet, lineups, ocorrências.</a:t>
+              <a:t xml:space="preserve">  -  Read-side de relatórios e vendas via eventos AMQP (CQRS event-driven).</a:t>
             </a:r>
             <a:endParaRPr lang="en-US" sz="1300" dirty="0"/>
           </a:p>
@@ -7119,7 +7120,7 @@
                 <a:ea typeface="Calibri" pitchFamily="34" charset="-122"/>
                 <a:cs typeface="Calibri" pitchFamily="34" charset="-120"/>
               </a:rPr>
-              <a:t>Frontend e Android</a:t>
+              <a:t>Frontend + Android  (em curso)</a:t>
             </a:r>
             <a:pPr indent="0" marL="0">
               <a:buNone/>
@@ -7133,7 +7134,7 @@
                 <a:ea typeface="Calibri" pitchFamily="34" charset="-122"/>
                 <a:cs typeface="Calibri" pitchFamily="34" charset="-120"/>
               </a:rPr>
-              <a:t>  -  Ecrãs de utilizador, geração de clientes API, app Android funcional.</a:t>
+              <a:t xml:space="preserve">  -  SPA P3 implementada do handoff Claude Design. Wire-up API real + Android em curso.</a:t>
             </a:r>
             <a:endParaRPr lang="en-US" sz="1300" dirty="0"/>
           </a:p>
@@ -7231,7 +7232,7 @@
                 <a:ea typeface="Calibri" pitchFamily="34" charset="-122"/>
                 <a:cs typeface="Calibri" pitchFamily="34" charset="-120"/>
               </a:rPr>
-              <a:t>Statistics + RabbitMQ + Deploy</a:t>
+              <a:t>SIBS real + Deploy + SU 1.º Dezembro</a:t>
             </a:r>
             <a:pPr indent="0" marL="0">
               <a:buNone/>
@@ -7245,7 +7246,7 @@
                 <a:ea typeface="Calibri" pitchFamily="34" charset="-122"/>
                 <a:cs typeface="Calibri" pitchFamily="34" charset="-120"/>
               </a:rPr>
-              <a:t>  -  Eventos assíncronos, relatórios, deploy em produção com SU 1.º Dezembro.</a:t>
+              <a:t xml:space="preserve">  -  Integração real com gateway de pagamento, HTTPS, CI/CD, deploy + validação com o clube parceiro.</a:t>
             </a:r>
             <a:endParaRPr lang="en-US" sz="1300" dirty="0"/>
           </a:p>
@@ -7385,6 +7386,1049 @@
               <a:t>github.com/bruno-pinto-git/tessera</a:t>
             </a:r>
             <a:endParaRPr lang="en-US" sz="1100" dirty="0"/>
+          </a:p>
+        </p:txBody>
+      </p:sp>
+    </p:spTree>
+  </p:cSld>
+  <p:clrMapOvr>
+    <a:masterClrMapping/>
+  </p:clrMapOvr>
+</p:sld>
+</file>
+
+<file path=ppt/slides/slide15.xml><?xml version="1.0" encoding="utf-8"?>
+<p:sld xmlns:a="http://schemas.openxmlformats.org/drawingml/2006/main" xmlns:r="http://schemas.openxmlformats.org/officeDocument/2006/relationships" xmlns:p="http://schemas.openxmlformats.org/presentationml/2006/main">
+  <p:cSld name="Slide 7">
+    <p:bg>
+      <p:bgPr>
+        <a:solidFill>
+          <a:srgbClr val="F5F2EA"/>
+        </a:solidFill>
+      </p:bgPr>
+    </p:bg>
+    <p:spTree>
+      <p:nvGrpSpPr>
+        <p:cNvPr id="1" name=""/>
+        <p:cNvGrpSpPr/>
+        <p:nvPr/>
+      </p:nvGrpSpPr>
+      <p:grpSpPr>
+        <a:xfrm>
+          <a:off x="0" y="0"/>
+          <a:ext cx="0" cy="0"/>
+          <a:chOff x="0" y="0"/>
+          <a:chExt cx="0" cy="0"/>
+        </a:xfrm>
+      </p:grpSpPr>
+      <p:sp>
+        <p:nvSpPr>
+          <p:cNvPr id="2" name="Shape 0"/>
+          <p:cNvSpPr/>
+          <p:nvPr/>
+        </p:nvSpPr>
+        <p:spPr>
+          <a:xfrm>
+            <a:off x="0" y="365760"/>
+            <a:ext cx="137160" cy="822960"/>
+          </a:xfrm>
+          <a:prstGeom prst="rect">
+            <a:avLst/>
+          </a:prstGeom>
+          <a:solidFill>
+            <a:srgbClr val="D4AF37"/>
+          </a:solidFill>
+          <a:ln/>
+        </p:spPr>
+      </p:sp>
+      <p:sp>
+        <p:nvSpPr>
+          <p:cNvPr id="3" name="Text 1"/>
+          <p:cNvSpPr/>
+          <p:nvPr/>
+        </p:nvSpPr>
+        <p:spPr>
+          <a:xfrm>
+            <a:off x="365760" y="320040"/>
+            <a:ext cx="11430000" cy="548640"/>
+          </a:xfrm>
+          <a:prstGeom prst="rect">
+            <a:avLst/>
+          </a:prstGeom>
+          <a:noFill/>
+          <a:ln/>
+        </p:spPr>
+        <p:txBody>
+          <a:bodyPr wrap="square" rtlCol="0" anchor="ctr"/>
+          <a:lstStyle/>
+          <a:p>
+            <a:pPr indent="0" marL="0">
+              <a:buNone/>
+            </a:pPr>
+            <a:r>
+              <a:rPr lang="en-US" sz="3200" b="1" dirty="0">
+                <a:solidFill>
+                  <a:srgbClr val="1E3A5F"/>
+                </a:solidFill>
+                <a:latin typeface="Calibri" pitchFamily="34" charset="0"/>
+                <a:ea typeface="Calibri" pitchFamily="34" charset="-122"/>
+                <a:cs typeface="Calibri" pitchFamily="34" charset="-120"/>
+              </a:rPr>
+              <a:t>O que está feito - Frontend Web</a:t>
+            </a:r>
+            <a:endParaRPr lang="en-US" sz="3200" dirty="0"/>
+          </a:p>
+        </p:txBody>
+      </p:sp>
+      <p:sp>
+        <p:nvSpPr>
+          <p:cNvPr id="4" name="Text 2"/>
+          <p:cNvSpPr/>
+          <p:nvPr/>
+        </p:nvSpPr>
+        <p:spPr>
+          <a:xfrm>
+            <a:off x="365760" y="868680"/>
+            <a:ext cx="11430000" cy="365760"/>
+          </a:xfrm>
+          <a:prstGeom prst="rect">
+            <a:avLst/>
+          </a:prstGeom>
+          <a:noFill/>
+          <a:ln/>
+        </p:spPr>
+        <p:txBody>
+          <a:bodyPr wrap="square" rtlCol="0" anchor="ctr"/>
+          <a:lstStyle/>
+          <a:p>
+            <a:pPr indent="0" marL="0">
+              <a:buNone/>
+            </a:pPr>
+            <a:r>
+              <a:rPr lang="en-US" sz="1400" i="1" dirty="0">
+                <a:solidFill>
+                  <a:srgbClr val="5C5C5C"/>
+                </a:solidFill>
+                <a:latin typeface="Calibri" pitchFamily="34" charset="0"/>
+                <a:ea typeface="Calibri" pitchFamily="34" charset="-122"/>
+                <a:cs typeface="Calibri" pitchFamily="34" charset="-120"/>
+              </a:rPr>
+              <a:t>Implementação a partir do handoff do Claude Design</a:t>
+            </a:r>
+            <a:endParaRPr lang="en-US" sz="1400" dirty="0"/>
+          </a:p>
+        </p:txBody>
+      </p:sp>
+      <p:sp>
+        <p:nvSpPr>
+          <p:cNvPr id="5" name="Shape 3"/>
+          <p:cNvSpPr/>
+          <p:nvPr/>
+        </p:nvSpPr>
+        <p:spPr>
+          <a:xfrm>
+            <a:off x="457200" y="1645920"/>
+            <a:ext cx="594360" cy="594360"/>
+          </a:xfrm>
+          <a:prstGeom prst="ellipse">
+            <a:avLst/>
+          </a:prstGeom>
+          <a:solidFill>
+            <a:srgbClr val="3A7D44"/>
+          </a:solidFill>
+          <a:ln w="12700">
+            <a:solidFill>
+              <a:srgbClr val="3A7D44"/>
+            </a:solidFill>
+            <a:prstDash val="solid"/>
+          </a:ln>
+        </p:spPr>
+      </p:sp>
+      <p:sp>
+        <p:nvSpPr>
+          <p:cNvPr id="6" name="Text 4"/>
+          <p:cNvSpPr/>
+          <p:nvPr/>
+        </p:nvSpPr>
+        <p:spPr>
+          <a:xfrm>
+            <a:off x="457200" y="1645920"/>
+            <a:ext cx="594360" cy="594360"/>
+          </a:xfrm>
+          <a:prstGeom prst="rect">
+            <a:avLst/>
+          </a:prstGeom>
+          <a:noFill/>
+          <a:ln/>
+        </p:spPr>
+        <p:txBody>
+          <a:bodyPr wrap="square" rtlCol="0" anchor="ctr"/>
+          <a:lstStyle/>
+          <a:p>
+            <a:pPr algn="ctr" indent="0" marL="0">
+              <a:buNone/>
+            </a:pPr>
+            <a:r>
+              <a:rPr lang="en-US" sz="1400" b="1" dirty="0">
+                <a:solidFill>
+                  <a:srgbClr val="FFFFFF"/>
+                </a:solidFill>
+                <a:latin typeface="Calibri" pitchFamily="34" charset="0"/>
+                <a:ea typeface="Calibri" pitchFamily="34" charset="-122"/>
+                <a:cs typeface="Calibri" pitchFamily="34" charset="-120"/>
+              </a:rPr>
+              <a:t>OK</a:t>
+            </a:r>
+            <a:endParaRPr lang="en-US" sz="1400" dirty="0"/>
+          </a:p>
+        </p:txBody>
+      </p:sp>
+      <p:sp>
+        <p:nvSpPr>
+          <p:cNvPr id="7" name="Shape 5"/>
+          <p:cNvSpPr/>
+          <p:nvPr/>
+        </p:nvSpPr>
+        <p:spPr>
+          <a:xfrm>
+            <a:off x="1280160" y="1508760"/>
+            <a:ext cx="10515600" cy="914400"/>
+          </a:xfrm>
+          <a:prstGeom prst="rect">
+            <a:avLst/>
+          </a:prstGeom>
+          <a:solidFill>
+            <a:srgbClr val="FFFFFF"/>
+          </a:solidFill>
+          <a:ln w="12700">
+            <a:solidFill>
+              <a:srgbClr val="F5F2EA"/>
+            </a:solidFill>
+            <a:prstDash val="solid"/>
+          </a:ln>
+        </p:spPr>
+      </p:sp>
+      <p:sp>
+        <p:nvSpPr>
+          <p:cNvPr id="8" name="Text 6"/>
+          <p:cNvSpPr/>
+          <p:nvPr/>
+        </p:nvSpPr>
+        <p:spPr>
+          <a:xfrm>
+            <a:off x="1463040" y="1600200"/>
+            <a:ext cx="10149840" cy="365760"/>
+          </a:xfrm>
+          <a:prstGeom prst="rect">
+            <a:avLst/>
+          </a:prstGeom>
+          <a:noFill/>
+          <a:ln/>
+        </p:spPr>
+        <p:txBody>
+          <a:bodyPr wrap="square" rtlCol="0" anchor="ctr"/>
+          <a:lstStyle/>
+          <a:p>
+            <a:pPr indent="0" marL="0">
+              <a:buNone/>
+            </a:pPr>
+            <a:r>
+              <a:rPr lang="en-US" sz="1600" b="1" dirty="0">
+                <a:solidFill>
+                  <a:srgbClr val="1E3A5F"/>
+                </a:solidFill>
+                <a:latin typeface="Calibri" pitchFamily="34" charset="0"/>
+                <a:ea typeface="Calibri" pitchFamily="34" charset="-122"/>
+                <a:cs typeface="Calibri" pitchFamily="34" charset="-120"/>
+              </a:rPr>
+              <a:t>Design system &amp; tokens</a:t>
+            </a:r>
+            <a:endParaRPr lang="en-US" sz="1600" dirty="0"/>
+          </a:p>
+        </p:txBody>
+      </p:sp>
+      <p:sp>
+        <p:nvSpPr>
+          <p:cNvPr id="9" name="Text 7"/>
+          <p:cNvSpPr/>
+          <p:nvPr/>
+        </p:nvSpPr>
+        <p:spPr>
+          <a:xfrm>
+            <a:off x="1463040" y="1920240"/>
+            <a:ext cx="10149840" cy="502920"/>
+          </a:xfrm>
+          <a:prstGeom prst="rect">
+            <a:avLst/>
+          </a:prstGeom>
+          <a:noFill/>
+          <a:ln/>
+        </p:spPr>
+        <p:txBody>
+          <a:bodyPr wrap="square" rtlCol="0" anchor="ctr"/>
+          <a:lstStyle/>
+          <a:p>
+            <a:pPr indent="0" marL="0">
+              <a:buNone/>
+            </a:pPr>
+            <a:r>
+              <a:rPr lang="en-US" sz="1200" dirty="0">
+                <a:solidFill>
+                  <a:srgbClr val="5C5C5C"/>
+                </a:solidFill>
+                <a:latin typeface="Calibri" pitchFamily="34" charset="0"/>
+                <a:ea typeface="Calibri" pitchFamily="34" charset="-122"/>
+                <a:cs typeface="Calibri" pitchFamily="34" charset="-120"/>
+              </a:rPr>
+              <a:t>Tailwind v4 (CSS-first) + shadcn/ui (new-york style). Paleta OKLCH com 4 cores semânticas (pending, paid, validated, cancelled). Dark mode via classe .dark. Tokens em src/index.css.</a:t>
+            </a:r>
+            <a:endParaRPr lang="en-US" sz="1200" dirty="0"/>
+          </a:p>
+        </p:txBody>
+      </p:sp>
+      <p:sp>
+        <p:nvSpPr>
+          <p:cNvPr id="10" name="Shape 8"/>
+          <p:cNvSpPr/>
+          <p:nvPr/>
+        </p:nvSpPr>
+        <p:spPr>
+          <a:xfrm>
+            <a:off x="457200" y="2606040"/>
+            <a:ext cx="594360" cy="594360"/>
+          </a:xfrm>
+          <a:prstGeom prst="ellipse">
+            <a:avLst/>
+          </a:prstGeom>
+          <a:solidFill>
+            <a:srgbClr val="3A7D44"/>
+          </a:solidFill>
+          <a:ln w="12700">
+            <a:solidFill>
+              <a:srgbClr val="3A7D44"/>
+            </a:solidFill>
+            <a:prstDash val="solid"/>
+          </a:ln>
+        </p:spPr>
+      </p:sp>
+      <p:sp>
+        <p:nvSpPr>
+          <p:cNvPr id="11" name="Text 9"/>
+          <p:cNvSpPr/>
+          <p:nvPr/>
+        </p:nvSpPr>
+        <p:spPr>
+          <a:xfrm>
+            <a:off x="457200" y="2606040"/>
+            <a:ext cx="594360" cy="594360"/>
+          </a:xfrm>
+          <a:prstGeom prst="rect">
+            <a:avLst/>
+          </a:prstGeom>
+          <a:noFill/>
+          <a:ln/>
+        </p:spPr>
+        <p:txBody>
+          <a:bodyPr wrap="square" rtlCol="0" anchor="ctr"/>
+          <a:lstStyle/>
+          <a:p>
+            <a:pPr algn="ctr" indent="0" marL="0">
+              <a:buNone/>
+            </a:pPr>
+            <a:r>
+              <a:rPr lang="en-US" sz="1400" b="1" dirty="0">
+                <a:solidFill>
+                  <a:srgbClr val="FFFFFF"/>
+                </a:solidFill>
+                <a:latin typeface="Calibri" pitchFamily="34" charset="0"/>
+                <a:ea typeface="Calibri" pitchFamily="34" charset="-122"/>
+                <a:cs typeface="Calibri" pitchFamily="34" charset="-120"/>
+              </a:rPr>
+              <a:t>OK</a:t>
+            </a:r>
+            <a:endParaRPr lang="en-US" sz="1400" dirty="0"/>
+          </a:p>
+        </p:txBody>
+      </p:sp>
+      <p:sp>
+        <p:nvSpPr>
+          <p:cNvPr id="12" name="Shape 10"/>
+          <p:cNvSpPr/>
+          <p:nvPr/>
+        </p:nvSpPr>
+        <p:spPr>
+          <a:xfrm>
+            <a:off x="1280160" y="2468880"/>
+            <a:ext cx="10515600" cy="914400"/>
+          </a:xfrm>
+          <a:prstGeom prst="rect">
+            <a:avLst/>
+          </a:prstGeom>
+          <a:solidFill>
+            <a:srgbClr val="FFFFFF"/>
+          </a:solidFill>
+          <a:ln w="12700">
+            <a:solidFill>
+              <a:srgbClr val="F5F2EA"/>
+            </a:solidFill>
+            <a:prstDash val="solid"/>
+          </a:ln>
+        </p:spPr>
+      </p:sp>
+      <p:sp>
+        <p:nvSpPr>
+          <p:cNvPr id="13" name="Text 11"/>
+          <p:cNvSpPr/>
+          <p:nvPr/>
+        </p:nvSpPr>
+        <p:spPr>
+          <a:xfrm>
+            <a:off x="1463040" y="2560320"/>
+            <a:ext cx="10149840" cy="365760"/>
+          </a:xfrm>
+          <a:prstGeom prst="rect">
+            <a:avLst/>
+          </a:prstGeom>
+          <a:noFill/>
+          <a:ln/>
+        </p:spPr>
+        <p:txBody>
+          <a:bodyPr wrap="square" rtlCol="0" anchor="ctr"/>
+          <a:lstStyle/>
+          <a:p>
+            <a:pPr indent="0" marL="0">
+              <a:buNone/>
+            </a:pPr>
+            <a:r>
+              <a:rPr lang="en-US" sz="1600" b="1" dirty="0">
+                <a:solidFill>
+                  <a:srgbClr val="1E3A5F"/>
+                </a:solidFill>
+                <a:latin typeface="Calibri" pitchFamily="34" charset="0"/>
+                <a:ea typeface="Calibri" pitchFamily="34" charset="-122"/>
+                <a:cs typeface="Calibri" pitchFamily="34" charset="-120"/>
+              </a:rPr>
+              <a:t>Catálogo público de jogos</a:t>
+            </a:r>
+            <a:endParaRPr lang="en-US" sz="1600" dirty="0"/>
+          </a:p>
+        </p:txBody>
+      </p:sp>
+      <p:sp>
+        <p:nvSpPr>
+          <p:cNvPr id="14" name="Text 12"/>
+          <p:cNvSpPr/>
+          <p:nvPr/>
+        </p:nvSpPr>
+        <p:spPr>
+          <a:xfrm>
+            <a:off x="1463040" y="2880360"/>
+            <a:ext cx="10149840" cy="502920"/>
+          </a:xfrm>
+          <a:prstGeom prst="rect">
+            <a:avLst/>
+          </a:prstGeom>
+          <a:noFill/>
+          <a:ln/>
+        </p:spPr>
+        <p:txBody>
+          <a:bodyPr wrap="square" rtlCol="0" anchor="ctr"/>
+          <a:lstStyle/>
+          <a:p>
+            <a:pPr indent="0" marL="0">
+              <a:buNone/>
+            </a:pPr>
+            <a:r>
+              <a:rPr lang="en-US" sz="1200" dirty="0">
+                <a:solidFill>
+                  <a:srgbClr val="5C5C5C"/>
+                </a:solidFill>
+                <a:latin typeface="Calibri" pitchFamily="34" charset="0"/>
+                <a:ea typeface="Calibri" pitchFamily="34" charset="-122"/>
+                <a:cs typeface="Calibri" pitchFamily="34" charset="-120"/>
+              </a:rPr>
+              <a:t>/events com filtros (Todos / Em casa / Fora / Esta semana) + search. /events/:id com hero, tabela de preços (Normal/Sócio) e admin sales card. Crests geométricos por clube.</a:t>
+            </a:r>
+            <a:endParaRPr lang="en-US" sz="1200" dirty="0"/>
+          </a:p>
+        </p:txBody>
+      </p:sp>
+      <p:sp>
+        <p:nvSpPr>
+          <p:cNvPr id="15" name="Shape 13"/>
+          <p:cNvSpPr/>
+          <p:nvPr/>
+        </p:nvSpPr>
+        <p:spPr>
+          <a:xfrm>
+            <a:off x="457200" y="3566160"/>
+            <a:ext cx="594360" cy="594360"/>
+          </a:xfrm>
+          <a:prstGeom prst="ellipse">
+            <a:avLst/>
+          </a:prstGeom>
+          <a:solidFill>
+            <a:srgbClr val="3A7D44"/>
+          </a:solidFill>
+          <a:ln w="12700">
+            <a:solidFill>
+              <a:srgbClr val="3A7D44"/>
+            </a:solidFill>
+            <a:prstDash val="solid"/>
+          </a:ln>
+        </p:spPr>
+      </p:sp>
+      <p:sp>
+        <p:nvSpPr>
+          <p:cNvPr id="16" name="Text 14"/>
+          <p:cNvSpPr/>
+          <p:nvPr/>
+        </p:nvSpPr>
+        <p:spPr>
+          <a:xfrm>
+            <a:off x="457200" y="3566160"/>
+            <a:ext cx="594360" cy="594360"/>
+          </a:xfrm>
+          <a:prstGeom prst="rect">
+            <a:avLst/>
+          </a:prstGeom>
+          <a:noFill/>
+          <a:ln/>
+        </p:spPr>
+        <p:txBody>
+          <a:bodyPr wrap="square" rtlCol="0" anchor="ctr"/>
+          <a:lstStyle/>
+          <a:p>
+            <a:pPr algn="ctr" indent="0" marL="0">
+              <a:buNone/>
+            </a:pPr>
+            <a:r>
+              <a:rPr lang="en-US" sz="1400" b="1" dirty="0">
+                <a:solidFill>
+                  <a:srgbClr val="FFFFFF"/>
+                </a:solidFill>
+                <a:latin typeface="Calibri" pitchFamily="34" charset="0"/>
+                <a:ea typeface="Calibri" pitchFamily="34" charset="-122"/>
+                <a:cs typeface="Calibri" pitchFamily="34" charset="-120"/>
+              </a:rPr>
+              <a:t>OK</a:t>
+            </a:r>
+            <a:endParaRPr lang="en-US" sz="1400" dirty="0"/>
+          </a:p>
+        </p:txBody>
+      </p:sp>
+      <p:sp>
+        <p:nvSpPr>
+          <p:cNvPr id="17" name="Shape 15"/>
+          <p:cNvSpPr/>
+          <p:nvPr/>
+        </p:nvSpPr>
+        <p:spPr>
+          <a:xfrm>
+            <a:off x="1280160" y="3429000"/>
+            <a:ext cx="10515600" cy="914400"/>
+          </a:xfrm>
+          <a:prstGeom prst="rect">
+            <a:avLst/>
+          </a:prstGeom>
+          <a:solidFill>
+            <a:srgbClr val="FFFFFF"/>
+          </a:solidFill>
+          <a:ln w="12700">
+            <a:solidFill>
+              <a:srgbClr val="F5F2EA"/>
+            </a:solidFill>
+            <a:prstDash val="solid"/>
+          </a:ln>
+        </p:spPr>
+      </p:sp>
+      <p:sp>
+        <p:nvSpPr>
+          <p:cNvPr id="18" name="Text 16"/>
+          <p:cNvSpPr/>
+          <p:nvPr/>
+        </p:nvSpPr>
+        <p:spPr>
+          <a:xfrm>
+            <a:off x="1463040" y="3520440"/>
+            <a:ext cx="10149840" cy="365760"/>
+          </a:xfrm>
+          <a:prstGeom prst="rect">
+            <a:avLst/>
+          </a:prstGeom>
+          <a:noFill/>
+          <a:ln/>
+        </p:spPr>
+        <p:txBody>
+          <a:bodyPr wrap="square" rtlCol="0" anchor="ctr"/>
+          <a:lstStyle/>
+          <a:p>
+            <a:pPr indent="0" marL="0">
+              <a:buNone/>
+            </a:pPr>
+            <a:r>
+              <a:rPr lang="en-US" sz="1600" b="1" dirty="0">
+                <a:solidFill>
+                  <a:srgbClr val="1E3A5F"/>
+                </a:solidFill>
+                <a:latin typeface="Calibri" pitchFamily="34" charset="0"/>
+                <a:ea typeface="Calibri" pitchFamily="34" charset="-122"/>
+                <a:cs typeface="Calibri" pitchFamily="34" charset="-120"/>
+              </a:rPr>
+              <a:t>Fluxo de compra em 3 passos</a:t>
+            </a:r>
+            <a:endParaRPr lang="en-US" sz="1600" dirty="0"/>
+          </a:p>
+        </p:txBody>
+      </p:sp>
+      <p:sp>
+        <p:nvSpPr>
+          <p:cNvPr id="19" name="Text 17"/>
+          <p:cNvSpPr/>
+          <p:nvPr/>
+        </p:nvSpPr>
+        <p:spPr>
+          <a:xfrm>
+            <a:off x="1463040" y="3840480"/>
+            <a:ext cx="10149840" cy="502920"/>
+          </a:xfrm>
+          <a:prstGeom prst="rect">
+            <a:avLst/>
+          </a:prstGeom>
+          <a:noFill/>
+          <a:ln/>
+        </p:spPr>
+        <p:txBody>
+          <a:bodyPr wrap="square" rtlCol="0" anchor="ctr"/>
+          <a:lstStyle/>
+          <a:p>
+            <a:pPr indent="0" marL="0">
+              <a:buNone/>
+            </a:pPr>
+            <a:r>
+              <a:rPr lang="en-US" sz="1200" dirty="0">
+                <a:solidFill>
+                  <a:srgbClr val="5C5C5C"/>
+                </a:solidFill>
+                <a:latin typeface="Calibri" pitchFamily="34" charset="0"/>
+                <a:ea typeface="Calibri" pitchFamily="34" charset="-122"/>
+                <a:cs typeface="Calibri" pitchFamily="34" charset="-120"/>
+              </a:rPr>
+              <a:t>Modal stepper (shadcn Dialog): escolher tier → método de pagamento (MBWAY/Cartão/Dinheiro) → confirmação com QR. Integrado com POST /tickets e POST /tickets/{id}/pay.</a:t>
+            </a:r>
+            <a:endParaRPr lang="en-US" sz="1200" dirty="0"/>
+          </a:p>
+        </p:txBody>
+      </p:sp>
+      <p:sp>
+        <p:nvSpPr>
+          <p:cNvPr id="20" name="Shape 18"/>
+          <p:cNvSpPr/>
+          <p:nvPr/>
+        </p:nvSpPr>
+        <p:spPr>
+          <a:xfrm>
+            <a:off x="457200" y="4526280"/>
+            <a:ext cx="594360" cy="594360"/>
+          </a:xfrm>
+          <a:prstGeom prst="ellipse">
+            <a:avLst/>
+          </a:prstGeom>
+          <a:solidFill>
+            <a:srgbClr val="3A7D44"/>
+          </a:solidFill>
+          <a:ln w="12700">
+            <a:solidFill>
+              <a:srgbClr val="3A7D44"/>
+            </a:solidFill>
+            <a:prstDash val="solid"/>
+          </a:ln>
+        </p:spPr>
+      </p:sp>
+      <p:sp>
+        <p:nvSpPr>
+          <p:cNvPr id="21" name="Text 19"/>
+          <p:cNvSpPr/>
+          <p:nvPr/>
+        </p:nvSpPr>
+        <p:spPr>
+          <a:xfrm>
+            <a:off x="457200" y="4526280"/>
+            <a:ext cx="594360" cy="594360"/>
+          </a:xfrm>
+          <a:prstGeom prst="rect">
+            <a:avLst/>
+          </a:prstGeom>
+          <a:noFill/>
+          <a:ln/>
+        </p:spPr>
+        <p:txBody>
+          <a:bodyPr wrap="square" rtlCol="0" anchor="ctr"/>
+          <a:lstStyle/>
+          <a:p>
+            <a:pPr algn="ctr" indent="0" marL="0">
+              <a:buNone/>
+            </a:pPr>
+            <a:r>
+              <a:rPr lang="en-US" sz="1400" b="1" dirty="0">
+                <a:solidFill>
+                  <a:srgbClr val="FFFFFF"/>
+                </a:solidFill>
+                <a:latin typeface="Calibri" pitchFamily="34" charset="0"/>
+                <a:ea typeface="Calibri" pitchFamily="34" charset="-122"/>
+                <a:cs typeface="Calibri" pitchFamily="34" charset="-120"/>
+              </a:rPr>
+              <a:t>OK</a:t>
+            </a:r>
+            <a:endParaRPr lang="en-US" sz="1400" dirty="0"/>
+          </a:p>
+        </p:txBody>
+      </p:sp>
+      <p:sp>
+        <p:nvSpPr>
+          <p:cNvPr id="22" name="Shape 20"/>
+          <p:cNvSpPr/>
+          <p:nvPr/>
+        </p:nvSpPr>
+        <p:spPr>
+          <a:xfrm>
+            <a:off x="1280160" y="4389120"/>
+            <a:ext cx="10515600" cy="914400"/>
+          </a:xfrm>
+          <a:prstGeom prst="rect">
+            <a:avLst/>
+          </a:prstGeom>
+          <a:solidFill>
+            <a:srgbClr val="FFFFFF"/>
+          </a:solidFill>
+          <a:ln w="12700">
+            <a:solidFill>
+              <a:srgbClr val="F5F2EA"/>
+            </a:solidFill>
+            <a:prstDash val="solid"/>
+          </a:ln>
+        </p:spPr>
+      </p:sp>
+      <p:sp>
+        <p:nvSpPr>
+          <p:cNvPr id="23" name="Text 21"/>
+          <p:cNvSpPr/>
+          <p:nvPr/>
+        </p:nvSpPr>
+        <p:spPr>
+          <a:xfrm>
+            <a:off x="1463040" y="4480560"/>
+            <a:ext cx="10149840" cy="365760"/>
+          </a:xfrm>
+          <a:prstGeom prst="rect">
+            <a:avLst/>
+          </a:prstGeom>
+          <a:noFill/>
+          <a:ln/>
+        </p:spPr>
+        <p:txBody>
+          <a:bodyPr wrap="square" rtlCol="0" anchor="ctr"/>
+          <a:lstStyle/>
+          <a:p>
+            <a:pPr indent="0" marL="0">
+              <a:buNone/>
+            </a:pPr>
+            <a:r>
+              <a:rPr lang="en-US" sz="1600" b="1" dirty="0">
+                <a:solidFill>
+                  <a:srgbClr val="1E3A5F"/>
+                </a:solidFill>
+                <a:latin typeface="Calibri" pitchFamily="34" charset="0"/>
+                <a:ea typeface="Calibri" pitchFamily="34" charset="-122"/>
+                <a:cs typeface="Calibri" pitchFamily="34" charset="-120"/>
+              </a:rPr>
+              <a:t>"Os meus bilhetes" + QR</a:t>
+            </a:r>
+            <a:endParaRPr lang="en-US" sz="1600" dirty="0"/>
+          </a:p>
+        </p:txBody>
+      </p:sp>
+      <p:sp>
+        <p:nvSpPr>
+          <p:cNvPr id="24" name="Text 22"/>
+          <p:cNvSpPr/>
+          <p:nvPr/>
+        </p:nvSpPr>
+        <p:spPr>
+          <a:xfrm>
+            <a:off x="1463040" y="4800600"/>
+            <a:ext cx="10149840" cy="502920"/>
+          </a:xfrm>
+          <a:prstGeom prst="rect">
+            <a:avLst/>
+          </a:prstGeom>
+          <a:noFill/>
+          <a:ln/>
+        </p:spPr>
+        <p:txBody>
+          <a:bodyPr wrap="square" rtlCol="0" anchor="ctr"/>
+          <a:lstStyle/>
+          <a:p>
+            <a:pPr indent="0" marL="0">
+              <a:buNone/>
+            </a:pPr>
+            <a:r>
+              <a:rPr lang="en-US" sz="1200" dirty="0">
+                <a:solidFill>
+                  <a:srgbClr val="5C5C5C"/>
+                </a:solidFill>
+                <a:latin typeface="Calibri" pitchFamily="34" charset="0"/>
+                <a:ea typeface="Calibri" pitchFamily="34" charset="-122"/>
+                <a:cs typeface="Calibri" pitchFamily="34" charset="-120"/>
+              </a:rPr>
+              <a:t>/tickets/mine agrupado por estado (Prontos, Aguarda pagamento, Histórico). QR renderizado client-side com qrcode.react sobre o code UUID do bilhete. Card com stub perfurado tipo bilhete real.</a:t>
+            </a:r>
+            <a:endParaRPr lang="en-US" sz="1200" dirty="0"/>
+          </a:p>
+        </p:txBody>
+      </p:sp>
+      <p:sp>
+        <p:nvSpPr>
+          <p:cNvPr id="25" name="Shape 23"/>
+          <p:cNvSpPr/>
+          <p:nvPr/>
+        </p:nvSpPr>
+        <p:spPr>
+          <a:xfrm>
+            <a:off x="457200" y="5486400"/>
+            <a:ext cx="594360" cy="594360"/>
+          </a:xfrm>
+          <a:prstGeom prst="ellipse">
+            <a:avLst/>
+          </a:prstGeom>
+          <a:solidFill>
+            <a:srgbClr val="3A7D44"/>
+          </a:solidFill>
+          <a:ln w="12700">
+            <a:solidFill>
+              <a:srgbClr val="3A7D44"/>
+            </a:solidFill>
+            <a:prstDash val="solid"/>
+          </a:ln>
+        </p:spPr>
+      </p:sp>
+      <p:sp>
+        <p:nvSpPr>
+          <p:cNvPr id="26" name="Text 24"/>
+          <p:cNvSpPr/>
+          <p:nvPr/>
+        </p:nvSpPr>
+        <p:spPr>
+          <a:xfrm>
+            <a:off x="457200" y="5486400"/>
+            <a:ext cx="594360" cy="594360"/>
+          </a:xfrm>
+          <a:prstGeom prst="rect">
+            <a:avLst/>
+          </a:prstGeom>
+          <a:noFill/>
+          <a:ln/>
+        </p:spPr>
+        <p:txBody>
+          <a:bodyPr wrap="square" rtlCol="0" anchor="ctr"/>
+          <a:lstStyle/>
+          <a:p>
+            <a:pPr algn="ctr" indent="0" marL="0">
+              <a:buNone/>
+            </a:pPr>
+            <a:r>
+              <a:rPr lang="en-US" sz="1400" b="1" dirty="0">
+                <a:solidFill>
+                  <a:srgbClr val="FFFFFF"/>
+                </a:solidFill>
+                <a:latin typeface="Calibri" pitchFamily="34" charset="0"/>
+                <a:ea typeface="Calibri" pitchFamily="34" charset="-122"/>
+                <a:cs typeface="Calibri" pitchFamily="34" charset="-120"/>
+              </a:rPr>
+              <a:t>OK</a:t>
+            </a:r>
+            <a:endParaRPr lang="en-US" sz="1400" dirty="0"/>
+          </a:p>
+        </p:txBody>
+      </p:sp>
+      <p:sp>
+        <p:nvSpPr>
+          <p:cNvPr id="27" name="Shape 25"/>
+          <p:cNvSpPr/>
+          <p:nvPr/>
+        </p:nvSpPr>
+        <p:spPr>
+          <a:xfrm>
+            <a:off x="1280160" y="5349240"/>
+            <a:ext cx="10515600" cy="914400"/>
+          </a:xfrm>
+          <a:prstGeom prst="rect">
+            <a:avLst/>
+          </a:prstGeom>
+          <a:solidFill>
+            <a:srgbClr val="FFFFFF"/>
+          </a:solidFill>
+          <a:ln w="12700">
+            <a:solidFill>
+              <a:srgbClr val="F5F2EA"/>
+            </a:solidFill>
+            <a:prstDash val="solid"/>
+          </a:ln>
+        </p:spPr>
+      </p:sp>
+      <p:sp>
+        <p:nvSpPr>
+          <p:cNvPr id="28" name="Text 26"/>
+          <p:cNvSpPr/>
+          <p:nvPr/>
+        </p:nvSpPr>
+        <p:spPr>
+          <a:xfrm>
+            <a:off x="1463040" y="5440680"/>
+            <a:ext cx="10149840" cy="365760"/>
+          </a:xfrm>
+          <a:prstGeom prst="rect">
+            <a:avLst/>
+          </a:prstGeom>
+          <a:noFill/>
+          <a:ln/>
+        </p:spPr>
+        <p:txBody>
+          <a:bodyPr wrap="square" rtlCol="0" anchor="ctr"/>
+          <a:lstStyle/>
+          <a:p>
+            <a:pPr indent="0" marL="0">
+              <a:buNone/>
+            </a:pPr>
+            <a:r>
+              <a:rPr lang="en-US" sz="1600" b="1" dirty="0">
+                <a:solidFill>
+                  <a:srgbClr val="1E3A5F"/>
+                </a:solidFill>
+                <a:latin typeface="Calibri" pitchFamily="34" charset="0"/>
+                <a:ea typeface="Calibri" pitchFamily="34" charset="-122"/>
+                <a:cs typeface="Calibri" pitchFamily="34" charset="-120"/>
+              </a:rPr>
+              <a:t>Validação no portão (staff)</a:t>
+            </a:r>
+            <a:endParaRPr lang="en-US" sz="1600" dirty="0"/>
+          </a:p>
+        </p:txBody>
+      </p:sp>
+      <p:sp>
+        <p:nvSpPr>
+          <p:cNvPr id="29" name="Text 27"/>
+          <p:cNvSpPr/>
+          <p:nvPr/>
+        </p:nvSpPr>
+        <p:spPr>
+          <a:xfrm>
+            <a:off x="1463040" y="5760720"/>
+            <a:ext cx="10149840" cy="502920"/>
+          </a:xfrm>
+          <a:prstGeom prst="rect">
+            <a:avLst/>
+          </a:prstGeom>
+          <a:noFill/>
+          <a:ln/>
+        </p:spPr>
+        <p:txBody>
+          <a:bodyPr wrap="square" rtlCol="0" anchor="ctr"/>
+          <a:lstStyle/>
+          <a:p>
+            <a:pPr indent="0" marL="0">
+              <a:buNone/>
+            </a:pPr>
+            <a:r>
+              <a:rPr lang="en-US" sz="1200" dirty="0">
+                <a:solidFill>
+                  <a:srgbClr val="5C5C5C"/>
+                </a:solidFill>
+                <a:latin typeface="Calibri" pitchFamily="34" charset="0"/>
+                <a:ea typeface="Calibri" pitchFamily="34" charset="-122"/>
+                <a:cs typeface="Calibri" pitchFamily="34" charset="-120"/>
+              </a:rPr>
+              <a:t>/validate mobile-first com 3 estados visuais (idle/success/reject), ligado ao POST /tickets/validate. Verde com check para PAID→VALIDATED, vermelho com X para já-usado / inválido / 404.</a:t>
+            </a:r>
+            <a:endParaRPr lang="en-US" sz="1200" dirty="0"/>
+          </a:p>
+        </p:txBody>
+      </p:sp>
+      <p:sp>
+        <p:nvSpPr>
+          <p:cNvPr id="30" name="Text 28"/>
+          <p:cNvSpPr/>
+          <p:nvPr/>
+        </p:nvSpPr>
+        <p:spPr>
+          <a:xfrm>
+            <a:off x="365760" y="6446520"/>
+            <a:ext cx="6400800" cy="274320"/>
+          </a:xfrm>
+          <a:prstGeom prst="rect">
+            <a:avLst/>
+          </a:prstGeom>
+          <a:noFill/>
+          <a:ln/>
+        </p:spPr>
+        <p:txBody>
+          <a:bodyPr wrap="square" rtlCol="0" anchor="ctr"/>
+          <a:lstStyle/>
+          <a:p>
+            <a:pPr indent="0" marL="0">
+              <a:buNone/>
+            </a:pPr>
+            <a:r>
+              <a:rPr lang="en-US" sz="900" i="1" dirty="0">
+                <a:solidFill>
+                  <a:srgbClr val="5C5C5C"/>
+                </a:solidFill>
+                <a:latin typeface="Calibri" pitchFamily="34" charset="0"/>
+                <a:ea typeface="Calibri" pitchFamily="34" charset="-122"/>
+                <a:cs typeface="Calibri" pitchFamily="34" charset="-120"/>
+              </a:rPr>
+              <a:t>Tessera | Projeto e Seminário | Grupo 31</a:t>
+            </a:r>
+            <a:endParaRPr lang="en-US" sz="900" dirty="0"/>
+          </a:p>
+        </p:txBody>
+      </p:sp>
+      <p:sp>
+        <p:nvSpPr>
+          <p:cNvPr id="31" name="Text 29"/>
+          <p:cNvSpPr/>
+          <p:nvPr/>
+        </p:nvSpPr>
+        <p:spPr>
+          <a:xfrm>
+            <a:off x="11521440" y="6446520"/>
+            <a:ext cx="365760" cy="274320"/>
+          </a:xfrm>
+          <a:prstGeom prst="rect">
+            <a:avLst/>
+          </a:prstGeom>
+          <a:noFill/>
+          <a:ln/>
+        </p:spPr>
+        <p:txBody>
+          <a:bodyPr wrap="square" rtlCol="0" anchor="ctr"/>
+          <a:lstStyle/>
+          <a:p>
+            <a:pPr algn="r" indent="0" marL="0">
+              <a:buNone/>
+            </a:pPr>
+            <a:r>
+              <a:rPr lang="en-US" sz="900" dirty="0">
+                <a:solidFill>
+                  <a:srgbClr val="5C5C5C"/>
+                </a:solidFill>
+                <a:latin typeface="Calibri" pitchFamily="34" charset="0"/>
+                <a:ea typeface="Calibri" pitchFamily="34" charset="-122"/>
+                <a:cs typeface="Calibri" pitchFamily="34" charset="-120"/>
+              </a:rPr>
+              <a:t>9</a:t>
+            </a:r>
+            <a:endParaRPr lang="en-US" sz="900" dirty="0"/>
           </a:p>
         </p:txBody>
       </p:sp>
@@ -7917,7 +8961,7 @@
                 <a:ea typeface="Calibri" pitchFamily="34" charset="-122"/>
                 <a:cs typeface="Calibri" pitchFamily="34" charset="-120"/>
               </a:rPr>
-              <a:t>Caso de uso real: </a:t>
+              <a:t xml:space="preserve">Caso de uso real: </a:t>
             </a:r>
             <a:pPr algn="ctr" indent="0" marL="0">
               <a:buNone/>
@@ -9018,7 +10062,7 @@
                 <a:ea typeface="Calibri" pitchFamily="34" charset="-122"/>
                 <a:cs typeface="Calibri" pitchFamily="34" charset="-120"/>
               </a:rPr>
-              <a:t>Requisitos não funcionais: </a:t>
+              <a:t xml:space="preserve">Requisitos não funcionais: </a:t>
             </a:r>
             <a:pPr algn="ctr" indent="0" marL="0">
               <a:buNone/>
@@ -10820,7 +11864,7 @@
                 <a:ea typeface="Calibri" pitchFamily="34" charset="-122"/>
                 <a:cs typeface="Calibri" pitchFamily="34" charset="-120"/>
               </a:rPr>
-              <a:t>:8080  </a:t>
+              <a:t xml:space="preserve">:8080  </a:t>
             </a:r>
             <a:pPr indent="0" marL="0">
               <a:buNone/>
@@ -11062,7 +12106,7 @@
                 <a:ea typeface="Calibri" pitchFamily="34" charset="-122"/>
                 <a:cs typeface="Calibri" pitchFamily="34" charset="-120"/>
               </a:rPr>
-              <a:t>:8081  </a:t>
+              <a:t xml:space="preserve">:8081  </a:t>
             </a:r>
             <a:pPr indent="0" marL="0">
               <a:buNone/>
@@ -11304,7 +12348,7 @@
                 <a:ea typeface="Calibri" pitchFamily="34" charset="-122"/>
                 <a:cs typeface="Calibri" pitchFamily="34" charset="-120"/>
               </a:rPr>
-              <a:t>:8082  </a:t>
+              <a:t xml:space="preserve">:8082  </a:t>
             </a:r>
             <a:pPr indent="0" marL="0">
               <a:buNone/>
@@ -11546,7 +12590,7 @@
                 <a:ea typeface="Calibri" pitchFamily="34" charset="-122"/>
                 <a:cs typeface="Calibri" pitchFamily="34" charset="-120"/>
               </a:rPr>
-              <a:t>:8083  </a:t>
+              <a:t xml:space="preserve">:8083  </a:t>
             </a:r>
             <a:pPr indent="0" marL="0">
               <a:buNone/>
@@ -11704,7 +12748,7 @@
                 <a:ea typeface="Calibri" pitchFamily="34" charset="-122"/>
                 <a:cs typeface="Calibri" pitchFamily="34" charset="-120"/>
               </a:rPr>
-              <a:t>Decisão: </a:t>
+              <a:t xml:space="preserve">Decisão: </a:t>
             </a:r>
             <a:pPr algn="ctr" indent="0" marL="0">
               <a:buNone/>
@@ -12211,7 +13255,7 @@
                 <a:ea typeface="Calibri" pitchFamily="34" charset="-122"/>
                 <a:cs typeface="Calibri" pitchFamily="34" charset="-120"/>
               </a:rPr>
-              <a:t>React + TypeScript + Vite</a:t>
+              <a:t>React + TS + Vite + Tailwind</a:t>
             </a:r>
             <a:endParaRPr lang="en-US" sz="1200" dirty="0"/>
           </a:p>
@@ -13792,7 +14836,7 @@
                 <a:ea typeface="Calibri" pitchFamily="34" charset="-122"/>
                 <a:cs typeface="Calibri" pitchFamily="34" charset="-120"/>
               </a:rPr>
-              <a:t>PAGAMENTOS</a:t>
+              <a:t>MENSAGENS</a:t>
             </a:r>
             <a:endParaRPr lang="en-US" sz="1000" dirty="0"/>
           </a:p>
@@ -13831,7 +14875,7 @@
                 <a:ea typeface="Calibri" pitchFamily="34" charset="-122"/>
                 <a:cs typeface="Calibri" pitchFamily="34" charset="-120"/>
               </a:rPr>
-              <a:t>API SIBS / MB WAY</a:t>
+              <a:t>RabbitMQ</a:t>
             </a:r>
             <a:endParaRPr lang="en-US" sz="1200" dirty="0"/>
           </a:p>
@@ -13870,7 +14914,7 @@
                 <a:ea typeface="Calibri" pitchFamily="34" charset="-122"/>
                 <a:cs typeface="Calibri" pitchFamily="34" charset="-120"/>
               </a:rPr>
-              <a:t>planeado</a:t>
+              <a:t>3.13</a:t>
             </a:r>
             <a:endParaRPr lang="en-US" sz="1100" dirty="0"/>
           </a:p>
@@ -15504,7 +16548,7 @@
             <a:avLst/>
           </a:prstGeom>
           <a:solidFill>
-            <a:srgbClr val="C73E1D"/>
+            <a:srgbClr val="3A7D44"/>
           </a:solidFill>
           <a:ln/>
         </p:spPr>
@@ -15743,7 +16787,7 @@
                 <a:ea typeface="Calibri" pitchFamily="34" charset="-122"/>
                 <a:cs typeface="Calibri" pitchFamily="34" charset="-120"/>
               </a:rPr>
-              <a:t>Bilheteira (event, ticket)</a:t>
+              <a:t>Bilhetes digitais, QR, pagamento, validação, eventos RabbitMQ</a:t>
             </a:r>
             <a:endParaRPr lang="en-US" sz="1100" dirty="0"/>
           </a:p>
@@ -15828,7 +16872,7 @@
             <a:avLst/>
           </a:prstGeom>
           <a:solidFill>
-            <a:srgbClr val="D4AF37"/>
+            <a:srgbClr val="3A7D44"/>
           </a:solidFill>
           <a:ln/>
         </p:spPr>
@@ -15905,7 +16949,7 @@
                 <a:ea typeface="Calibri" pitchFamily="34" charset="-122"/>
                 <a:cs typeface="Calibri" pitchFamily="34" charset="-120"/>
               </a:rPr>
-              <a:t>Esqueleto (a desenvolver)</a:t>
+              <a:t>Clubes, equipas, jogadores, jogos + ficha técnica e ocorrências</a:t>
             </a:r>
             <a:endParaRPr lang="en-US" sz="1100" dirty="0"/>
           </a:p>
@@ -15990,7 +17034,7 @@
             <a:avLst/>
           </a:prstGeom>
           <a:solidFill>
-            <a:srgbClr val="D4AF37"/>
+            <a:srgbClr val="3A7D44"/>
           </a:solidFill>
           <a:ln/>
         </p:spPr>
@@ -16067,7 +17111,7 @@
                 <a:ea typeface="Calibri" pitchFamily="34" charset="-122"/>
                 <a:cs typeface="Calibri" pitchFamily="34" charset="-120"/>
               </a:rPr>
-              <a:t>Esqueleto (a desenvolver)</a:t>
+              <a:t>Read-side de relatórios + vendas (consumidor RabbitMQ)</a:t>
             </a:r>
             <a:endParaRPr lang="en-US" sz="1100" dirty="0"/>
           </a:p>
@@ -16145,7 +17189,7 @@
                 <a:ea typeface="Calibri" pitchFamily="34" charset="-122"/>
                 <a:cs typeface="Calibri" pitchFamily="34" charset="-120"/>
               </a:rPr>
-              <a:t>Cada serviço: </a:t>
+              <a:t xml:space="preserve">Cada serviço: </a:t>
             </a:r>
             <a:pPr algn="ctr" indent="0" marL="0">
               <a:buNone/>
@@ -17230,7 +18274,7 @@
                 <a:ea typeface="Calibri" pitchFamily="34" charset="-122"/>
                 <a:cs typeface="Calibri" pitchFamily="34" charset="-120"/>
               </a:rPr>
-              <a:t>* /tickets - bilhetes
+              <a:t>* /tickets · /tickets/mine
 </a:t>
             </a:r>
             <a:pPr indent="0" marL="0">
@@ -17248,7 +18292,7 @@
                 <a:ea typeface="Calibri" pitchFamily="34" charset="-122"/>
                 <a:cs typeface="Calibri" pitchFamily="34" charset="-120"/>
               </a:rPr>
-              <a:t>* /events - eventos de bilheteira
+              <a:t>* /tickets/{id}/pay · /tickets/validate
 </a:t>
             </a:r>
             <a:pPr indent="0" marL="0">
@@ -17266,7 +18310,7 @@
                 <a:ea typeface="Calibri" pitchFamily="34" charset="-122"/>
                 <a:cs typeface="Calibri" pitchFamily="34" charset="-120"/>
               </a:rPr>
-              <a:t>* /payments - pagamentos
+              <a:t>* /events catalog (admin)
 </a:t>
             </a:r>
             <a:pPr indent="0" marL="0">
@@ -17302,7 +18346,7 @@
                 <a:ea typeface="Calibri" pitchFamily="34" charset="-122"/>
                 <a:cs typeface="Calibri" pitchFamily="34" charset="-120"/>
               </a:rPr>
-              <a:t>* /stats/matches/{id}
+              <a:t>* /stats/match-sheets
 </a:t>
             </a:r>
             <a:pPr indent="0" marL="0">
@@ -17320,7 +18364,7 @@
                 <a:ea typeface="Calibri" pitchFamily="34" charset="-122"/>
                 <a:cs typeface="Calibri" pitchFamily="34" charset="-120"/>
               </a:rPr>
-              <a:t>* /stats/players/{id}
+              <a:t>* /stats/sales/summary · /by-match
 </a:t>
             </a:r>
             <a:pPr indent="0" marL="0">
@@ -17338,7 +18382,7 @@
                 <a:ea typeface="Calibri" pitchFamily="34" charset="-122"/>
                 <a:cs typeface="Calibri" pitchFamily="34" charset="-120"/>
               </a:rPr>
-              <a:t>* /stats/teams/{id}</a:t>
+              <a:t>* /stats/sales/range?from=&amp;to=</a:t>
             </a:r>
             <a:endParaRPr lang="en-US" sz="1300" dirty="0"/>
           </a:p>
@@ -17377,7 +18421,7 @@
                 <a:ea typeface="Calibri" pitchFamily="34" charset="-122"/>
                 <a:cs typeface="Calibri" pitchFamily="34" charset="-120"/>
               </a:rPr>
-              <a:t>Convenções: </a:t>
+              <a:t xml:space="preserve">Convenções: </a:t>
             </a:r>
             <a:pPr algn="ctr" indent="0" marL="0">
               <a:buNone/>
@@ -17469,7 +18513,7 @@
                 <a:ea typeface="Calibri" pitchFamily="34" charset="-122"/>
                 <a:cs typeface="Calibri" pitchFamily="34" charset="-120"/>
               </a:rPr>
-              <a:t>9</a:t>
+              <a:t>10</a:t>
             </a:r>
             <a:endParaRPr lang="en-US" sz="900" dirty="0"/>
           </a:p>
